--- a/docs/apresentacao_legacy_case.pptx
+++ b/docs/apresentacao_legacy_case.pptx
@@ -2535,7 +2535,7 @@
                 <a:ea typeface="Cambria" pitchFamily="34" charset="-122"/>
                 <a:cs typeface="Cambria" pitchFamily="34" charset="-120"/>
               </a:rPr>
-              <a:t>0.96</a:t>
+              <a:t>1.00</a:t>
             </a:r>
             <a:endParaRPr lang="en-US" sz="2400" dirty="0"/>
           </a:p>
@@ -6211,7 +6211,7 @@
                 <a:ea typeface="Calibri" pitchFamily="34" charset="-122"/>
                 <a:cs typeface="Calibri" pitchFamily="34" charset="-120"/>
               </a:rPr>
-              <a:t>Embeddings + reranker multilíngues; pool 20→50; métricas do sistema real; grupos de docs alternativos</a:t>
+              <a:t>Embeddings + reranker multilíngues; pool 20→50; métricas do sistema real; query decomposition multi-empresa</a:t>
             </a:r>
             <a:endParaRPr lang="en-US" sz="1150" dirty="0"/>
           </a:p>
@@ -6318,7 +6318,7 @@
                 <a:ea typeface="Calibri" pitchFamily="34" charset="-122"/>
                 <a:cs typeface="Calibri" pitchFamily="34" charset="-120"/>
               </a:rPr>
-              <a:t>Recall@10 0.96, MRR 0.82, recusas 100%</a:t>
+              <a:t>Recall@10 1.00, MRR 0.875, respostas e recusas 100%. Eval de retrieval roda no CI como gate</a:t>
             </a:r>
             <a:endParaRPr lang="en-US" sz="1150" dirty="0"/>
           </a:p>
@@ -6537,7 +6537,7 @@
                 <a:ea typeface="Cambria" pitchFamily="34" charset="-122"/>
                 <a:cs typeface="Cambria" pitchFamily="34" charset="-120"/>
               </a:rPr>
-              <a:t>0.96</a:t>
+              <a:t>1.00</a:t>
             </a:r>
             <a:endParaRPr lang="en-US" sz="4000" dirty="0"/>
           </a:p>
@@ -6615,7 +6615,7 @@
                 <a:ea typeface="Calibri" pitchFamily="34" charset="-122"/>
                 <a:cs typeface="Calibri" pitchFamily="34" charset="-120"/>
               </a:rPr>
-              <a:t>documentos corretos entre os 10 primeiros</a:t>
+              <a:t>todos os documentos corretos no top-10</a:t>
             </a:r>
             <a:endParaRPr lang="en-US" sz="1150" dirty="0"/>
           </a:p>
@@ -6681,7 +6681,7 @@
                 <a:ea typeface="Cambria" pitchFamily="34" charset="-122"/>
                 <a:cs typeface="Cambria" pitchFamily="34" charset="-120"/>
               </a:rPr>
-              <a:t>0.82</a:t>
+              <a:t>0.875</a:t>
             </a:r>
             <a:endParaRPr lang="en-US" sz="4000" dirty="0"/>
           </a:p>
@@ -6969,7 +6969,7 @@
                 <a:ea typeface="Cambria" pitchFamily="34" charset="-122"/>
                 <a:cs typeface="Cambria" pitchFamily="34" charset="-120"/>
               </a:rPr>
-              <a:t>92%</a:t>
+              <a:t>100%</a:t>
             </a:r>
             <a:endParaRPr lang="en-US" sz="4000" dirty="0"/>
           </a:p>
@@ -7086,7 +7086,7 @@
                 <a:ea typeface="Calibri" pitchFamily="34" charset="-122"/>
                 <a:cs typeface="Calibri" pitchFamily="34" charset="-120"/>
               </a:rPr>
-              <a:t>Honestidade: a única falha restante é a pergunta que pede capex anual de duas empresas de uma vez (10-Ks gigantes competindo com dezenas de trimestrais). Taxa de resposta depende do LLM: 92% (70B) vs 58% (8B, recusa demais) — retrieval não muda.</a:t>
+              <a:t>Honestidade: recall 1.00 em 14 perguntas indica gold set fácil para o sistema atual — próximo passo é expandi-lo, não celebrar. Taxa de resposta depende do LLM: 100% (70B) vs 58% (8B) — retrieval não muda. Eval de retrieval vira gate no CI.</a:t>
             </a:r>
             <a:endParaRPr lang="en-US" sz="1100" dirty="0"/>
           </a:p>

--- a/docs/apresentacao_legacy_case.pptx
+++ b/docs/apresentacao_legacy_case.pptx
@@ -2535,7 +2535,7 @@
                 <a:ea typeface="Cambria" pitchFamily="34" charset="-122"/>
                 <a:cs typeface="Cambria" pitchFamily="34" charset="-120"/>
               </a:rPr>
-              <a:t>1.00</a:t>
+              <a:t>0.94</a:t>
             </a:r>
             <a:endParaRPr lang="en-US" sz="2400" dirty="0"/>
           </a:p>
@@ -2574,7 +2574,7 @@
                 <a:ea typeface="Calibri" pitchFamily="34" charset="-122"/>
                 <a:cs typeface="Calibri" pitchFamily="34" charset="-120"/>
               </a:rPr>
-              <a:t>Recall@10</a:t>
+              <a:t>Recall@10 (42 perguntas)</a:t>
             </a:r>
             <a:endParaRPr lang="en-US" sz="1100" dirty="0"/>
           </a:p>
@@ -6318,7 +6318,7 @@
                 <a:ea typeface="Calibri" pitchFamily="34" charset="-122"/>
                 <a:cs typeface="Calibri" pitchFamily="34" charset="-120"/>
               </a:rPr>
-              <a:t>Recall@10 1.00, MRR 0.875, respostas e recusas 100%. Eval de retrieval roda no CI como gate</a:t>
+              <a:t>Recall@10 0.94 em 42 perguntas (1.00 nas 14 originais). Gold set expandido de proposito; eval roda no CI como gate</a:t>
             </a:r>
             <a:endParaRPr lang="en-US" sz="1150" dirty="0"/>
           </a:p>
@@ -6537,7 +6537,7 @@
                 <a:ea typeface="Cambria" pitchFamily="34" charset="-122"/>
                 <a:cs typeface="Cambria" pitchFamily="34" charset="-120"/>
               </a:rPr>
-              <a:t>1.00</a:t>
+              <a:t>0.94</a:t>
             </a:r>
             <a:endParaRPr lang="en-US" sz="4000" dirty="0"/>
           </a:p>
@@ -6615,7 +6615,7 @@
                 <a:ea typeface="Calibri" pitchFamily="34" charset="-122"/>
                 <a:cs typeface="Calibri" pitchFamily="34" charset="-120"/>
               </a:rPr>
-              <a:t>todos os documentos corretos no top-10</a:t>
+              <a:t>em 42 perguntas verificadas (1.00 nas 14 originais)</a:t>
             </a:r>
             <a:endParaRPr lang="en-US" sz="1150" dirty="0"/>
           </a:p>
@@ -6681,7 +6681,7 @@
                 <a:ea typeface="Cambria" pitchFamily="34" charset="-122"/>
                 <a:cs typeface="Cambria" pitchFamily="34" charset="-120"/>
               </a:rPr>
-              <a:t>0.875</a:t>
+              <a:t>0.75</a:t>
             </a:r>
             <a:endParaRPr lang="en-US" sz="4000" dirty="0"/>
           </a:p>
@@ -6759,7 +6759,7 @@
                 <a:ea typeface="Calibri" pitchFamily="34" charset="-122"/>
                 <a:cs typeface="Calibri" pitchFamily="34" charset="-120"/>
               </a:rPr>
-              <a:t>o documento certo vem no topo</a:t>
+              <a:t>o documento certo vem no topo (42 perguntas)</a:t>
             </a:r>
             <a:endParaRPr lang="en-US" sz="1150" dirty="0"/>
           </a:p>
@@ -7086,7 +7086,7 @@
                 <a:ea typeface="Calibri" pitchFamily="34" charset="-122"/>
                 <a:cs typeface="Calibri" pitchFamily="34" charset="-120"/>
               </a:rPr>
-              <a:t>Honestidade: recall 1.00 em 14 perguntas indica gold set fácil para o sistema atual — próximo passo é expandi-lo, não celebrar. Taxa de resposta depende do LLM: 100% (70B) vs 58% (8B) — retrieval não muda. Eval de retrieval vira gate no CI.</a:t>
+              <a:t>Honestidade: recall 1.00 nas 14 originais indicava saturação — expandimos para 42 e o 0.94 expôs 2 falhas reais (RPO em notas de 10-Q; reranker prioriza tópico sobre entidade), que viram as próximas melhorias. Taxas de resposta/recusa medidas com o 70B.</a:t>
             </a:r>
             <a:endParaRPr lang="en-US" sz="1100" dirty="0"/>
           </a:p>
